--- a/presentation/Endpraesentation_LLM_vs_Crawler_v2.pptx
+++ b/presentation/Endpraesentation_LLM_vs_Crawler_v2.pptx
@@ -205,7 +205,7 @@
             <c:strRef>
               <c:f>Sheet1!$A$2:$A$6</c:f>
               <c:strCache>
-                <c:ptCount val="5"/>
+                <c:ptCount val="4"/>
                 <c:pt idx="0">
                   <c:v>SSR</c:v>
                 </c:pt>
@@ -218,9 +218,6 @@
                 <c:pt idx="3">
                   <c:v>Readability</c:v>
                 </c:pt>
-                <c:pt idx="4">
-                  <c:v>FuncSuit</c:v>
-                </c:pt>
               </c:strCache>
             </c:strRef>
           </c:cat>
@@ -229,7 +226,7 @@
               <c:f>Sheet1!$B$2:$B$6</c:f>
               <c:numCache>
                 <c:formatCode>General</c:formatCode>
-                <c:ptCount val="5"/>
+                <c:ptCount val="4"/>
                 <c:pt idx="0">
                   <c:v>1</c:v>
                 </c:pt>
@@ -241,9 +238,6 @@
                 </c:pt>
                 <c:pt idx="3">
                   <c:v>0.4</c:v>
-                </c:pt>
-                <c:pt idx="4">
-                  <c:v>0.6</c:v>
                 </c:pt>
               </c:numCache>
             </c:numRef>
@@ -316,7 +310,7 @@
             <c:strRef>
               <c:f>Sheet1!$A$2:$A$6</c:f>
               <c:strCache>
-                <c:ptCount val="5"/>
+                <c:ptCount val="4"/>
                 <c:pt idx="0">
                   <c:v>SSR</c:v>
                 </c:pt>
@@ -329,9 +323,6 @@
                 <c:pt idx="3">
                   <c:v>Readability</c:v>
                 </c:pt>
-                <c:pt idx="4">
-                  <c:v>FuncSuit</c:v>
-                </c:pt>
               </c:strCache>
             </c:strRef>
           </c:cat>
@@ -340,7 +331,7 @@
               <c:f>Sheet1!$C$2:$C$6</c:f>
               <c:numCache>
                 <c:formatCode>General</c:formatCode>
-                <c:ptCount val="5"/>
+                <c:ptCount val="4"/>
                 <c:pt idx="0">
                   <c:v>0.52300000000000002</c:v>
                 </c:pt>
@@ -352,9 +343,6 @@
                 </c:pt>
                 <c:pt idx="3">
                   <c:v>0.90400000000000003</c:v>
-                </c:pt>
-                <c:pt idx="4">
-                  <c:v>0.70899999999999996</c:v>
                 </c:pt>
               </c:numCache>
             </c:numRef>
@@ -592,7 +580,7 @@
             <c:strRef>
               <c:f>Sheet1!$A$2:$A$6</c:f>
               <c:strCache>
-                <c:ptCount val="5"/>
+                <c:ptCount val="4"/>
                 <c:pt idx="0">
                   <c:v>SSR</c:v>
                 </c:pt>
@@ -605,9 +593,6 @@
                 <c:pt idx="3">
                   <c:v>Appropriateness</c:v>
                 </c:pt>
-                <c:pt idx="4">
-                  <c:v>FuncSuit</c:v>
-                </c:pt>
               </c:strCache>
             </c:strRef>
           </c:cat>
@@ -616,7 +601,7 @@
               <c:f>Sheet1!$B$2:$B$6</c:f>
               <c:numCache>
                 <c:formatCode>General</c:formatCode>
-                <c:ptCount val="5"/>
+                <c:ptCount val="4"/>
                 <c:pt idx="0">
                   <c:v>0.55000000000000004</c:v>
                 </c:pt>
@@ -628,9 +613,6 @@
                 </c:pt>
                 <c:pt idx="3">
                   <c:v>0.75800000000000001</c:v>
-                </c:pt>
-                <c:pt idx="4">
-                  <c:v>0.65600000000000003</c:v>
                 </c:pt>
               </c:numCache>
             </c:numRef>
@@ -703,7 +685,7 @@
             <c:strRef>
               <c:f>Sheet1!$A$2:$A$6</c:f>
               <c:strCache>
-                <c:ptCount val="5"/>
+                <c:ptCount val="4"/>
                 <c:pt idx="0">
                   <c:v>SSR</c:v>
                 </c:pt>
@@ -716,9 +698,6 @@
                 <c:pt idx="3">
                   <c:v>Appropriateness</c:v>
                 </c:pt>
-                <c:pt idx="4">
-                  <c:v>FuncSuit</c:v>
-                </c:pt>
               </c:strCache>
             </c:strRef>
           </c:cat>
@@ -727,7 +706,7 @@
               <c:f>Sheet1!$C$2:$C$6</c:f>
               <c:numCache>
                 <c:formatCode>General</c:formatCode>
-                <c:ptCount val="5"/>
+                <c:ptCount val="4"/>
                 <c:pt idx="0">
                   <c:v>0.47</c:v>
                 </c:pt>
@@ -739,9 +718,6 @@
                 </c:pt>
                 <c:pt idx="3">
                   <c:v>0.71399999999999997</c:v>
-                </c:pt>
-                <c:pt idx="4">
-                  <c:v>0.6</c:v>
                 </c:pt>
               </c:numCache>
             </c:numRef>
@@ -2063,7 +2039,7 @@
                   <c:v># Tests</c:v>
                 </c:pt>
                 <c:pt idx="2">
-                  <c:v>FuncSuit</c:v>
+                  <c:v>ISO Correctness</c:v>
                 </c:pt>
                 <c:pt idx="3">
                   <c:v>Completeness</c:v>
@@ -2087,7 +2063,7 @@
                   <c:v>16</c:v>
                 </c:pt>
                 <c:pt idx="2">
-                  <c:v>12</c:v>
+                  <c:v>15</c:v>
                 </c:pt>
                 <c:pt idx="3">
                   <c:v>34</c:v>
@@ -2174,7 +2150,7 @@
                   <c:v># Tests</c:v>
                 </c:pt>
                 <c:pt idx="2">
-                  <c:v>FuncSuit</c:v>
+                  <c:v>ISO Correctness</c:v>
                 </c:pt>
                 <c:pt idx="3">
                   <c:v>Completeness</c:v>
@@ -2198,7 +2174,7 @@
                   <c:v>0</c:v>
                 </c:pt>
                 <c:pt idx="2">
-                  <c:v>14</c:v>
+                  <c:v>15</c:v>
                 </c:pt>
                 <c:pt idx="3">
                   <c:v>25</c:v>
@@ -2285,7 +2261,7 @@
                   <c:v># Tests</c:v>
                 </c:pt>
                 <c:pt idx="2">
-                  <c:v>FuncSuit</c:v>
+                  <c:v>ISO Correctness</c:v>
                 </c:pt>
                 <c:pt idx="3">
                   <c:v>Completeness</c:v>
@@ -8526,7 +8502,7 @@
                           <a:ea typeface="Calibri" pitchFamily="34" charset="-122"/>
                           <a:cs typeface="Calibri" pitchFamily="34" charset="-120"/>
                         </a:rPr>
-                        <a:t>ISO: Functional Suitability  ↑</a:t>
+                        <a:t>ISO: Correctness  ↑</a:t>
                       </a:r>
                       <a:endParaRPr lang="en-US" sz="1050" dirty="0">
                         <a:latin typeface="Calibri" charset="0"/>
@@ -8591,7 +8567,7 @@
                           <a:ea typeface="Calibri" pitchFamily="34" charset="-122"/>
                           <a:cs typeface="Calibri" pitchFamily="34" charset="-120"/>
                         </a:rPr>
-                        <a:t>0.600</a:t>
+                        <a:t>0.900</a:t>
                       </a:r>
                       <a:endParaRPr lang="en-US" sz="1050" dirty="0">
                         <a:latin typeface="Calibri" charset="0"/>
@@ -8659,7 +8635,7 @@
                           <a:ea typeface="Calibri" pitchFamily="34" charset="-122"/>
                           <a:cs typeface="Calibri" pitchFamily="34" charset="-120"/>
                         </a:rPr>
-                        <a:t>0.709 ± 0.085</a:t>
+                        <a:t>0.670 ± 0.102</a:t>
                       </a:r>
                       <a:endParaRPr lang="en-US" sz="1050" dirty="0">
                         <a:latin typeface="Calibri" charset="0"/>
@@ -8727,7 +8703,7 @@
                           <a:ea typeface="Calibri" pitchFamily="34" charset="-122"/>
                           <a:cs typeface="Calibri" pitchFamily="34" charset="-120"/>
                         </a:rPr>
-                        <a:t>0.656 ± 0.094</a:t>
+                        <a:t>0.666 ± 0.102</a:t>
                       </a:r>
                       <a:endParaRPr lang="en-US" sz="1050" dirty="0">
                         <a:latin typeface="Calibri" charset="0"/>
@@ -8795,7 +8771,7 @@
                           <a:ea typeface="Calibri" pitchFamily="34" charset="-122"/>
                           <a:cs typeface="Calibri" pitchFamily="34" charset="-120"/>
                         </a:rPr>
-                        <a:t>0.600 ± 0.115</a:t>
+                        <a:t>0.620 ± 0.115</a:t>
                       </a:r>
                       <a:endParaRPr lang="en-US" sz="1050" dirty="0">
                         <a:latin typeface="Calibri" charset="0"/>
@@ -9232,7 +9208,7 @@
                 <a:ea typeface="Calibri" pitchFamily="34" charset="-122"/>
                 <a:cs typeface="Calibri" pitchFamily="34" charset="-120"/>
               </a:rPr>
-              <a:t>Appropriateness +0.49, Readability +0.50, FuncSuit 0.709 vs. 0.600 — echte, benannte Verhaltens-Checks.</a:t>
+              <a:t>Appropriateness +0.49, Readability +0.50, ISO Completeness 0.563 vs. 0.500 — echte, benannte Verhaltens-Checks.</a:t>
             </a:r>
             <a:endParaRPr lang="en-US" sz="1200" dirty="0"/>
           </a:p>
@@ -9724,7 +9700,7 @@
                 <a:ea typeface="Calibri" pitchFamily="34" charset="-122"/>
                 <a:cs typeface="Calibri" pitchFamily="34" charset="-120"/>
               </a:rPr>
-              <a:t>SSR +0.08, FuncSuit 0.656 vs. 0.600 — bei einem Fünftel der Kosten. S sieht 3 Seiten live, H nur 1.</a:t>
+              <a:t>SSR +0.08, alle drei ISO-Subwerte vorn (Completeness 0.543 vs. 0.467) — bei einem Fünftel der Kosten. S sieht 3 Seiten live, H nur 1.</a:t>
             </a:r>
             <a:endParaRPr lang="en-US" sz="1200" dirty="0"/>
           </a:p>
@@ -11982,7 +11958,7 @@
                 <a:ea typeface="Calibri" pitchFamily="34" charset="-122"/>
                 <a:cs typeface="Calibri" pitchFamily="34" charset="-120"/>
               </a:rPr>
-              <a:t>L: FuncSuit 0.709 vs. 0.600, Appropriateness +0.49 — der Crawler liefert Breite, aber keine Verifikation.</a:t>
+              <a:t>L: Completeness 0.563 vs. 0.500, Appropriateness +0.49 — der Crawler liefert Breite, aber keine Verifikation.</a:t>
             </a:r>
             <a:endParaRPr lang="en-US" sz="1350" dirty="0"/>
           </a:p>
@@ -17727,7 +17703,7 @@
                 <a:ea typeface="Calibri" pitchFamily="34" charset="-122"/>
                 <a:cs typeface="Calibri" pitchFamily="34" charset="-120"/>
               </a:rPr>
-              <a:t>Mittel aus drei Subcharakteristiken</a:t>
+              <a:t>drei Subcharakteristiken — einzeln berichtet (ISO 25023), kein Gesamtscore</a:t>
             </a:r>
             <a:endParaRPr lang="en-US" sz="1250" dirty="0"/>
           </a:p>
@@ -18582,6 +18558,45 @@
               <a:t>Lokal per Docker gehostet — reproduzierbar, offline, ohne Rate-Limits.</a:t>
             </a:r>
             <a:endParaRPr lang="en-US" sz="1350" dirty="0"/>
+          </a:p>
+        </p:txBody>
+      </p:sp>
+      <p:sp>
+        <p:nvSpPr>
+          <p:cNvPr id="13" name="ScopeNote"/>
+          <p:cNvSpPr/>
+          <p:nvPr/>
+        </p:nvSpPr>
+        <p:spPr>
+          <a:xfrm>
+            <a:off x="640080" y="6035040"/>
+            <a:ext cx="10972800" cy="411480"/>
+          </a:xfrm>
+          <a:prstGeom prst="rect">
+            <a:avLst/>
+          </a:prstGeom>
+          <a:noFill/>
+          <a:ln/>
+        </p:spPr>
+        <p:txBody>
+          <a:bodyPr wrap="square" lIns="0" tIns="0" rIns="0" bIns="0" rtlCol="0" anchor="ctr"/>
+          <a:lstStyle/>
+          <a:p>
+            <a:pPr marL="0" indent="0">
+              <a:buNone/>
+            </a:pPr>
+            <a:r>
+              <a:rPr lang="en-US" sz="1300" i="1" dirty="0">
+                <a:solidFill>
+                  <a:srgbClr val="6B7683"/>
+                </a:solidFill>
+                <a:latin typeface="Calibri" pitchFamily="34" charset="0"/>
+                <a:ea typeface="Calibri" pitchFamily="34" charset="-122"/>
+                <a:cs typeface="Calibri" pitchFamily="34" charset="-120"/>
+              </a:rPr>
+              <a:t>Scope: ausschließlich funktionale UI-Tests — die absichtlichen Schwachstellen der App sind nicht Testgegenstand (keine Security-/Last-/Usability-Tests).</a:t>
+            </a:r>
+            <a:endParaRPr lang="en-US" sz="1150" dirty="0"/>
           </a:p>
         </p:txBody>
       </p:sp>
